--- a/5.11 fjy/PartB_slides.pptx
+++ b/5.11 fjy/PartB_slides.pptx
@@ -504,7 +504,7 @@
           <a:lstStyle/>
           <a:p>
             <a:r>
-              <a:t>30s: I analysed whether the rail network can absorb the America's Cup demand with a V/C saturation analysis. Key finding: not a total-capacity problem, a distribution problem. The Bagnoli venue has 3 lines and spare capacity, but Metro Line 1 — the central spine through Napoli Centrale — is the binding constraint: 0.69 to 0.84 at peak, over 1.0 if transit share reaches 60%. So the network won't collapse overall, but L1 will unless that corridor is reinforced.</a:t>
+              <a:t>Not a total-capacity problem, a distribution problem. Bagnoli venue has 3 lines and spare capacity, but Metro Line 1 — central spine through Napoli Centrale — is the binding constraint: 0.69 to 0.84, over 1.0 if transit share reaches 60%.</a:t>
             </a:r>
           </a:p>
         </p:txBody>
@@ -574,7 +574,7 @@
           <a:lstStyle/>
           <a:p>
             <a:r>
-              <a:t>Two angles. Left: spatial — red bubbles (big tourist load, saturated) cluster in central Naples / Napoli Centrale; green = the venue, which has headroom. Right: sensitivity — I tested transit share at 40/50/60% because the phone data can't observe metro mode share. Only Line 1 crosses 1.0, and only at 60%. So the conclusion 'L1 is the constraint' is robust to the assumption; the absolute number isn't, and I'm transparent about that.</a:t>
+              <a:t>Left: choropleth on real zone boundaries — added demand concentrates in central Naples and the gateway; the venue absorbs less. Right: sensitivity — only Line 1 crosses 1.0, only at 60% transit share, so the 'L1 is the constraint' conclusion is robust to the assumption.</a:t>
             </a:r>
           </a:p>
         </p:txBody>
@@ -644,7 +644,7 @@
           <a:lstStyle/>
           <a:p>
             <a:r>
-              <a:t>I also built a real road-network travel-time matrix with OSRM to see where demand originates. 73% is within a 45-min drive of the venues — Naples-centred, which is exactly why the central Line 1 corridor takes the pressure. ~20% comes from beyond 60 min and leans on regional rail. Conclusion: it's a distribution problem, not a shortfall — target Line 1 and the gateway, rather than building new lines. The detailed mitigation (shuttle bus) is the Services-improvement part.</a:t>
+              <a:t>OSRM accessibility: 73% within a 45-min drive — Naples-centred, why the central corridor takes the pressure. ~20% from beyond 60 min leans on regional rail. Conclusion: distribution problem, not shortfall — target Line 1 and the gateway. Mitigation (shuttle bus) is the Services-improvement part.</a:t>
             </a:r>
           </a:p>
         </p:txBody>
@@ -3688,7 +3688,7 @@
                   <a:srgbClr val="555555"/>
                 </a:solidFill>
               </a:rPr>
-              <a:t>Part B — Capacity &amp; Saturation analysis (V/C).  Diagnosis only; mitigation = Services-improvement section.</a:t>
+              <a:t>Part B — Capacity &amp; Saturation analysis (V/C). Diagnosis only; mitigation = Services-improvement section.</a:t>
             </a:r>
           </a:p>
         </p:txBody>
@@ -3882,7 +3882,7 @@
       </p:sp>
       <p:pic>
         <p:nvPicPr>
-          <p:cNvPr id="3" name="Picture 2" descr="B_map_saturation.png"/>
+          <p:cNvPr id="3" name="Picture 2" descr="B_map_saturation_shapefile.png"/>
           <p:cNvPicPr>
             <a:picLocks noChangeAspect="1"/>
           </p:cNvPicPr>
@@ -3897,7 +3897,7 @@
         <p:spPr>
           <a:xfrm>
             <a:off x="365760" y="1371600"/>
-            <a:ext cx="5212080" cy="4598664"/>
+            <a:ext cx="5394960" cy="3774252"/>
           </a:xfrm>
           <a:prstGeom prst="rect">
             <a:avLst/>
@@ -3920,8 +3920,8 @@
         </p:blipFill>
         <p:spPr>
           <a:xfrm>
-            <a:off x="5852160" y="1463040"/>
-            <a:ext cx="6035040" cy="3647402"/>
+            <a:off x="5943600" y="1554480"/>
+            <a:ext cx="5943600" cy="3592138"/>
           </a:xfrm>
           <a:prstGeom prst="rect">
             <a:avLst/>
@@ -3936,8 +3936,8 @@
         </p:nvSpPr>
         <p:spPr>
           <a:xfrm>
-            <a:off x="5852160" y="5394960"/>
-            <a:ext cx="6035040" cy="1280160"/>
+            <a:off x="5943600" y="5486400"/>
+            <a:ext cx="5943600" cy="1188720"/>
           </a:xfrm>
           <a:prstGeom prst="rect">
             <a:avLst/>
@@ -3961,7 +3961,7 @@
                   <a:srgbClr val="555555"/>
                 </a:solidFill>
               </a:rPr>
-              <a:t>• Venue (West): 3 lines, V/C ~0.35 — ample headroom.  Central spine L1: 0.69→0.84, crosses 1.0 at 60% transit share.</a:t>
+              <a:t>• Choropleth: added demand lands on central Naples / Napoli Centrale; the venue is lighter. Sensitivity: only L1 crosses 1.0 (at 60%).</a:t>
             </a:r>
           </a:p>
         </p:txBody>
@@ -4019,7 +4019,7 @@
       </p:sp>
       <p:pic>
         <p:nvPicPr>
-          <p:cNvPr id="3" name="Picture 2" descr="B_map_accessibility_osrm.png"/>
+          <p:cNvPr id="3" name="Picture 2" descr="B_map_accessibility_shapefile.png"/>
           <p:cNvPicPr>
             <a:picLocks noChangeAspect="1"/>
           </p:cNvPicPr>
@@ -4034,7 +4034,7 @@
         <p:spPr>
           <a:xfrm>
             <a:off x="365760" y="1325880"/>
-            <a:ext cx="5212080" cy="4910101"/>
+            <a:ext cx="5394960" cy="4717221"/>
           </a:xfrm>
           <a:prstGeom prst="rect">
             <a:avLst/>
@@ -4049,8 +4049,8 @@
         </p:nvSpPr>
         <p:spPr>
           <a:xfrm>
-            <a:off x="5760720" y="1463040"/>
-            <a:ext cx="6126480" cy="2926080"/>
+            <a:off x="5943600" y="1463040"/>
+            <a:ext cx="5943600" cy="2926080"/>
           </a:xfrm>
           <a:prstGeom prst="rect">
             <a:avLst/>
@@ -4109,8 +4109,8 @@
         </p:nvSpPr>
         <p:spPr>
           <a:xfrm>
-            <a:off x="5760720" y="4480560"/>
-            <a:ext cx="6126480" cy="2011680"/>
+            <a:off x="5943600" y="4480560"/>
+            <a:ext cx="5943600" cy="2011680"/>
           </a:xfrm>
           <a:prstGeom prst="rect">
             <a:avLst/>
@@ -4141,7 +4141,7 @@
           <a:p>
             <a:r>
               <a:rPr sz="1500"/>
-              <a:t>• → Target relief on L1 / Napoli Centrale (peak frequency ↑, divert via Line 6 Municipio↔Mostra).</a:t>
+              <a:t>• → Target relief on L1 / Napoli Centrale (peak frequency ↑, divert via Line 6).</a:t>
             </a:r>
           </a:p>
           <a:p>

--- a/5.11 fjy/PartB_slides.pptx
+++ b/5.11 fjy/PartB_slides.pptx
@@ -574,7 +574,7 @@
           <a:lstStyle/>
           <a:p>
             <a:r>
-              <a:t>Left: choropleth on real zone boundaries — added demand concentrates in central Naples and the gateway; the venue absorbs less. Right: sensitivity — only Line 1 crosses 1.0, only at 60% transit share, so the 'L1 is the constraint' conclusion is robust to the assumption.</a:t>
+              <a:t>Left: choropleth on real zone boundaries — added demand concentrates in central Naples and the gateway; the venue absorbs less. Right: sensitivity — only Line 1 crosses 1.0, only at 60% transit share, so the conclusion is robust to the assumption.</a:t>
             </a:r>
           </a:p>
         </p:txBody>
@@ -3688,7 +3688,7 @@
                   <a:srgbClr val="555555"/>
                 </a:solidFill>
               </a:rPr>
-              <a:t>Part B — Capacity &amp; Saturation analysis (V/C). Diagnosis only; mitigation = Services-improvement section.</a:t>
+              <a:t>Part B — Capacity &amp; Saturation (V/C). Diagnosis only; mitigation = Services-improvement section.</a:t>
             </a:r>
           </a:p>
         </p:txBody>

--- a/5.11 fjy/PartB_slides.pptx
+++ b/5.11 fjy/PartB_slides.pptx
@@ -3821,8 +3821,8 @@
         </p:blipFill>
         <p:spPr>
           <a:xfrm>
-            <a:off x="5760720" y="1325880"/>
-            <a:ext cx="6126480" cy="3687829"/>
+            <a:off x="5760720" y="1321435"/>
+            <a:ext cx="6126480" cy="3696718"/>
           </a:xfrm>
           <a:prstGeom prst="rect">
             <a:avLst/>

--- a/5.11 fjy/PartB_slides.pptx
+++ b/5.11 fjy/PartB_slides.pptx
@@ -504,7 +504,7 @@
           <a:lstStyle/>
           <a:p>
             <a:r>
-              <a:t>Not a total-capacity problem, a distribution problem. Bagnoli venue has 3 lines and spare capacity, but Metro Line 1 — central spine through Napoli Centrale — is the binding constraint: 0.69 to 0.84, over 1.0 if transit share reaches 60%.</a:t>
+              <a:t>Not a total-capacity problem, a distribution problem. Bagnoli venue has 3 lines and spare capacity, but Metro Line 1 — central spine through Napoli Centrale — is the binding constraint: 0.71 to 0.91 on an event day, over 1.0 at 60% transit share or under corridor concentration (1.20).</a:t>
             </a:r>
           </a:p>
         </p:txBody>
@@ -644,7 +644,7 @@
           <a:lstStyle/>
           <a:p>
             <a:r>
-              <a:t>OSRM accessibility: 73% within a 45-min drive — Naples-centred, why the central corridor takes the pressure. ~20% from beyond 60 min leans on regional rail. Conclusion: distribution problem, not shortfall — target Line 1 and the gateway. Mitigation (shuttle bus) is the Services-improvement part.</a:t>
+              <a:t>OSRM accessibility: 71% within a 45-min drive (mean 41 min) — Naples-centred, why the central corridor takes the pressure. ~21% from beyond 60 min leans on regional rail. Conclusion: distribution problem, not shortfall — target Line 1 and the gateway. Mitigation (shuttle bus) is the Services-improvement part.</a:t>
             </a:r>
           </a:p>
         </p:txBody>
@@ -3737,7 +3737,7 @@
             </a:pPr>
             <a:r>
               <a:rPr sz="1600" b="0"/>
-              <a:t>• Metro Line 1 is the binding constraint: 0.69 → 0.84 at peak, &gt;1.0 if transit share hits 60%.</a:t>
+              <a:t>• Metro Line 1 is the binding constraint: 0.71 → 0.91 at peak (event day), &gt;1.0 at 60% transit share or under corridor concentration (1.20).</a:t>
             </a:r>
           </a:p>
           <a:p>
@@ -3763,7 +3763,7 @@
             </a:pPr>
             <a:r>
               <a:rPr sz="1600" b="0"/>
-              <a:t>• Region-wide  +11%</a:t>
+              <a:t>• Region-wide  +9.7%</a:t>
             </a:r>
           </a:p>
           <a:p>
@@ -3774,7 +3774,7 @@
             </a:pPr>
             <a:r>
               <a:rPr sz="1600" b="0"/>
-              <a:t>• Central event zones  +23%</a:t>
+              <a:t>• Event-day, 9 event zones  +25%</a:t>
             </a:r>
           </a:p>
           <a:p>
@@ -3789,7 +3789,7 @@
                   <a:srgbClr val="C0392B"/>
                 </a:solidFill>
               </a:rPr>
-              <a:t>• Napoli Centrale gateway  +50%</a:t>
+              <a:t>• Steepest: Centro Direzionale +74%, Race Village +45%</a:t>
             </a:r>
           </a:p>
           <a:p>
@@ -3800,7 +3800,7 @@
             </a:pPr>
             <a:r>
               <a:rPr sz="1600" b="0"/>
-              <a:t>• The race venue (Bagnoli) is over-served — 3 lines, V/C only ~0.35.</a:t>
+              <a:t>• The race venue (Bagnoli) is over-served — 3 lines, V/C only ~0.5–0.7.</a:t>
             </a:r>
           </a:p>
         </p:txBody>
@@ -3822,7 +3822,7 @@
         <p:spPr>
           <a:xfrm>
             <a:off x="5760720" y="1321435"/>
-            <a:ext cx="6126480" cy="3696718"/>
+            <a:ext cx="6126480" cy="3699463"/>
           </a:xfrm>
           <a:prstGeom prst="rect">
             <a:avLst/>
@@ -3897,7 +3897,7 @@
         <p:spPr>
           <a:xfrm>
             <a:off x="365760" y="1371600"/>
-            <a:ext cx="5394960" cy="3774252"/>
+            <a:ext cx="5394960" cy="3774251"/>
           </a:xfrm>
           <a:prstGeom prst="rect">
             <a:avLst/>
@@ -4034,7 +4034,7 @@
         <p:spPr>
           <a:xfrm>
             <a:off x="365760" y="1325880"/>
-            <a:ext cx="5394960" cy="4717221"/>
+            <a:ext cx="5394960" cy="4703326"/>
           </a:xfrm>
           <a:prstGeom prst="rect">
             <a:avLst/>
@@ -4085,7 +4085,7 @@
             </a:pPr>
             <a:r>
               <a:rPr sz="1600" b="0"/>
-              <a:t>• 73% of Campania-origin tourist demand is within a 45-min drive (mean 37 min) → Naples-centred → confirms central L1 pressure.</a:t>
+              <a:t>• 71% of Campania-origin tourist demand is within a 45-min drive (mean 41 min) → Naples-centred → confirms central L1 pressure.</a:t>
             </a:r>
           </a:p>
           <a:p>
@@ -4096,7 +4096,7 @@
             </a:pPr>
             <a:r>
               <a:rPr sz="1600" b="0"/>
-              <a:t>• ~20% comes from &gt;60 min away (Salerno/Cilento) → relies on road approaches + regional rail.</a:t>
+              <a:t>• ~21% comes from &gt;60 min away (Salerno/Cilento) → relies on road approaches + regional rail.</a:t>
             </a:r>
           </a:p>
         </p:txBody>

--- a/5.11 fjy/PartB_slides.pptx
+++ b/5.11 fjy/PartB_slides.pptx
@@ -1,15 +1,18 @@
 
 <file path=ppt/presentation.xml><?xml version="1.0" encoding="utf-8"?>
-<p:presentation xmlns:a="http://schemas.openxmlformats.org/drawingml/2006/main" xmlns:r="http://schemas.openxmlformats.org/officeDocument/2006/relationships" xmlns:p="http://schemas.openxmlformats.org/presentationml/2006/main" saveSubsetFonts="1" autoCompressPictures="0">
+<p:presentation xmlns:a="http://schemas.openxmlformats.org/drawingml/2006/main" xmlns:r="http://schemas.openxmlformats.org/officeDocument/2006/relationships" xmlns:p="http://schemas.openxmlformats.org/presentationml/2006/main" autoCompressPictures="0">
   <p:sldMasterIdLst>
     <p:sldMasterId id="2147483648" r:id="rId1"/>
   </p:sldMasterIdLst>
+  <p:notesMasterIdLst>
+    <p:notesMasterId r:id="rId4"/>
+  </p:notesMasterIdLst>
   <p:sldIdLst>
-    <p:sldId id="256" r:id="rId7"/>
-    <p:sldId id="257" r:id="rId9"/>
-    <p:sldId id="258" r:id="rId10"/>
+    <p:sldId id="256" r:id="rId3"/>
+    <p:sldId id="257" r:id="rId5"/>
+    <p:sldId id="258" r:id="rId6"/>
   </p:sldIdLst>
-  <p:sldSz cx="12191695" cy="6858000" type="screen4x3"/>
+  <p:sldSz cx="12191365" cy="6858000" type="screen4x3"/>
   <p:notesSz cx="6858000" cy="9144000"/>
   <p:defaultTextStyle>
     <a:defPPr>
@@ -106,11 +109,27 @@
       </a:defRPr>
     </a:lvl9pPr>
   </p:defaultTextStyle>
+  <p:extLst>
+    <p:ext uri="{EFAFB233-063F-42B5-8137-9DF3F51BA10A}">
+      <p15:sldGuideLst xmlns:p15="http://schemas.microsoft.com/office/powerpoint/2012/main">
+        <p15:guide id="1" orient="horz" pos="2160" userDrawn="1">
+          <p15:clr>
+            <a:srgbClr val="A4A3A4"/>
+          </p15:clr>
+        </p15:guide>
+        <p15:guide id="2" pos="2880" userDrawn="1">
+          <p15:clr>
+            <a:srgbClr val="A4A3A4"/>
+          </p15:clr>
+        </p15:guide>
+      </p15:sldGuideLst>
+    </p:ext>
+  </p:extLst>
 </p:presentation>
 </file>
 
 <file path=ppt/notesMasters/notesMaster1.xml><?xml version="1.0" encoding="utf-8"?>
-<p:notesMaster xmlns:a="http://schemas.openxmlformats.org/drawingml/2006/main" xmlns:p="http://schemas.openxmlformats.org/presentationml/2006/main" xmlns:r="http://schemas.openxmlformats.org/officeDocument/2006/relationships">
+<p:notesMaster xmlns:a="http://schemas.openxmlformats.org/drawingml/2006/main" xmlns:r="http://schemas.openxmlformats.org/officeDocument/2006/relationships" xmlns:p="http://schemas.openxmlformats.org/presentationml/2006/main">
   <p:cSld>
     <p:bg>
       <p:bgRef idx="1001">
@@ -191,7 +210,6 @@
           <a:p>
             <a:fld id="{0F89C1C7-3DCD-1040-A9CF-14679D8B5DDD}" type="datetimeFigureOut">
               <a:rPr lang="en-US" smtClean="0"/>
-              <a:t>10/17/16</a:t>
             </a:fld>
             <a:endParaRPr lang="en-US"/>
           </a:p>
@@ -258,6 +276,7 @@
               <a:rPr lang="en-US" smtClean="0"/>
               <a:t>Click to edit Master text styles</a:t>
             </a:r>
+            <a:endParaRPr lang="en-US" smtClean="0"/>
           </a:p>
           <a:p>
             <a:pPr lvl="1"/>
@@ -265,6 +284,7 @@
               <a:rPr lang="en-US" smtClean="0"/>
               <a:t>Second level</a:t>
             </a:r>
+            <a:endParaRPr lang="en-US" smtClean="0"/>
           </a:p>
           <a:p>
             <a:pPr lvl="2"/>
@@ -272,6 +292,7 @@
               <a:rPr lang="en-US" smtClean="0"/>
               <a:t>Third level</a:t>
             </a:r>
+            <a:endParaRPr lang="en-US" smtClean="0"/>
           </a:p>
           <a:p>
             <a:pPr lvl="3"/>
@@ -279,6 +300,7 @@
               <a:rPr lang="en-US" smtClean="0"/>
               <a:t>Fourth level</a:t>
             </a:r>
+            <a:endParaRPr lang="en-US" smtClean="0"/>
           </a:p>
           <a:p>
             <a:pPr lvl="4"/>
@@ -350,18 +372,12 @@
           <a:p>
             <a:fld id="{BB5E49A5-4136-284D-997B-48E1D791AD67}" type="slidenum">
               <a:rPr lang="en-US" smtClean="0"/>
-              <a:t>‹#›</a:t>
             </a:fld>
             <a:endParaRPr lang="en-US"/>
           </a:p>
         </p:txBody>
       </p:sp>
     </p:spTree>
-    <p:extLst>
-      <p:ext uri="{BB962C8B-B14F-4D97-AF65-F5344CB8AC3E}">
-        <p14:creationId xmlns:p14="http://schemas.microsoft.com/office/powerpoint/2010/main" val="2623252185"/>
-      </p:ext>
-    </p:extLst>
   </p:cSld>
   <p:clrMap bg1="lt1" tx1="dk1" bg2="lt2" tx2="dk2" accent1="accent1" accent2="accent2" accent3="accent3" accent4="accent4" accent5="accent5" accent6="accent6" hlink="hlink" folHlink="folHlink"/>
   <p:notesStyle>
@@ -460,7 +476,7 @@
 </file>
 
 <file path=ppt/notesSlides/notesSlide1.xml><?xml version="1.0" encoding="utf-8"?>
-<p:notes xmlns:a="http://schemas.openxmlformats.org/drawingml/2006/main" xmlns:p="http://schemas.openxmlformats.org/presentationml/2006/main" xmlns:r="http://schemas.openxmlformats.org/officeDocument/2006/relationships">
+<p:notes xmlns:a="http://schemas.openxmlformats.org/drawingml/2006/main" xmlns:r="http://schemas.openxmlformats.org/officeDocument/2006/relationships" xmlns:p="http://schemas.openxmlformats.org/presentationml/2006/main">
   <p:cSld>
     <p:spTree>
       <p:nvGrpSpPr>
@@ -495,7 +511,7 @@
             <a:spLocks noGrp="1"/>
           </p:cNvSpPr>
           <p:nvPr>
-            <p:ph type="body" idx="3" sz="quarter"/>
+            <p:ph type="body" sz="quarter" idx="3"/>
           </p:nvPr>
         </p:nvSpPr>
         <p:spPr/>
@@ -516,7 +532,7 @@
             <a:spLocks noGrp="1"/>
           </p:cNvSpPr>
           <p:nvPr>
-            <p:ph type="sldNum" idx="5" sz="quarter"/>
+            <p:ph type="sldNum" sz="quarter" idx="5"/>
           </p:nvPr>
         </p:nvSpPr>
         <p:spPr/>
@@ -530,7 +546,7 @@
 </file>
 
 <file path=ppt/notesSlides/notesSlide2.xml><?xml version="1.0" encoding="utf-8"?>
-<p:notes xmlns:a="http://schemas.openxmlformats.org/drawingml/2006/main" xmlns:p="http://schemas.openxmlformats.org/presentationml/2006/main" xmlns:r="http://schemas.openxmlformats.org/officeDocument/2006/relationships">
+<p:notes xmlns:a="http://schemas.openxmlformats.org/drawingml/2006/main" xmlns:r="http://schemas.openxmlformats.org/officeDocument/2006/relationships" xmlns:p="http://schemas.openxmlformats.org/presentationml/2006/main">
   <p:cSld>
     <p:spTree>
       <p:nvGrpSpPr>
@@ -565,7 +581,7 @@
             <a:spLocks noGrp="1"/>
           </p:cNvSpPr>
           <p:nvPr>
-            <p:ph type="body" idx="3" sz="quarter"/>
+            <p:ph type="body" sz="quarter" idx="3"/>
           </p:nvPr>
         </p:nvSpPr>
         <p:spPr/>
@@ -586,7 +602,7 @@
             <a:spLocks noGrp="1"/>
           </p:cNvSpPr>
           <p:nvPr>
-            <p:ph type="sldNum" idx="5" sz="quarter"/>
+            <p:ph type="sldNum" sz="quarter" idx="5"/>
           </p:nvPr>
         </p:nvSpPr>
         <p:spPr/>
@@ -600,7 +616,7 @@
 </file>
 
 <file path=ppt/notesSlides/notesSlide3.xml><?xml version="1.0" encoding="utf-8"?>
-<p:notes xmlns:a="http://schemas.openxmlformats.org/drawingml/2006/main" xmlns:p="http://schemas.openxmlformats.org/presentationml/2006/main" xmlns:r="http://schemas.openxmlformats.org/officeDocument/2006/relationships">
+<p:notes xmlns:a="http://schemas.openxmlformats.org/drawingml/2006/main" xmlns:r="http://schemas.openxmlformats.org/officeDocument/2006/relationships" xmlns:p="http://schemas.openxmlformats.org/presentationml/2006/main">
   <p:cSld>
     <p:spTree>
       <p:nvGrpSpPr>
@@ -635,7 +651,7 @@
             <a:spLocks noGrp="1"/>
           </p:cNvSpPr>
           <p:nvPr>
-            <p:ph type="body" idx="3" sz="quarter"/>
+            <p:ph type="body" sz="quarter" idx="3"/>
           </p:nvPr>
         </p:nvSpPr>
         <p:spPr/>
@@ -656,7 +672,7 @@
             <a:spLocks noGrp="1"/>
           </p:cNvSpPr>
           <p:nvPr>
-            <p:ph type="sldNum" idx="5" sz="quarter"/>
+            <p:ph type="sldNum" sz="quarter" idx="5"/>
           </p:nvPr>
         </p:nvSpPr>
         <p:spPr/>
@@ -850,7 +866,6 @@
           <a:p>
             <a:fld id="{5BCAD085-E8A6-8845-BD4E-CB4CCA059FC4}" type="datetimeFigureOut">
               <a:rPr lang="en-US" smtClean="0"/>
-              <a:t>1/27/13</a:t>
             </a:fld>
             <a:endParaRPr lang="en-US"/>
           </a:p>
@@ -892,18 +907,12 @@
           <a:p>
             <a:fld id="{C1FF6DA9-008F-8B48-92A6-B652298478BF}" type="slidenum">
               <a:rPr lang="en-US" smtClean="0"/>
-              <a:t>‹#›</a:t>
             </a:fld>
             <a:endParaRPr lang="en-US"/>
           </a:p>
         </p:txBody>
       </p:sp>
     </p:spTree>
-    <p:extLst>
-      <p:ext uri="{BB962C8B-B14F-4D97-AF65-F5344CB8AC3E}">
-        <p14:creationId xmlns:p14="http://schemas.microsoft.com/office/powerpoint/2010/main" val="3168075583"/>
-      </p:ext>
-    </p:extLst>
   </p:cSld>
   <p:clrMapOvr>
     <a:masterClrMapping/>
@@ -971,6 +980,7 @@
               <a:rPr lang="en-US" smtClean="0"/>
               <a:t>Click to edit Master text styles</a:t>
             </a:r>
+            <a:endParaRPr lang="en-US" smtClean="0"/>
           </a:p>
           <a:p>
             <a:pPr lvl="1"/>
@@ -978,6 +988,7 @@
               <a:rPr lang="en-US" smtClean="0"/>
               <a:t>Second level</a:t>
             </a:r>
+            <a:endParaRPr lang="en-US" smtClean="0"/>
           </a:p>
           <a:p>
             <a:pPr lvl="2"/>
@@ -985,6 +996,7 @@
               <a:rPr lang="en-US" smtClean="0"/>
               <a:t>Third level</a:t>
             </a:r>
+            <a:endParaRPr lang="en-US" smtClean="0"/>
           </a:p>
           <a:p>
             <a:pPr lvl="3"/>
@@ -992,6 +1004,7 @@
               <a:rPr lang="en-US" smtClean="0"/>
               <a:t>Fourth level</a:t>
             </a:r>
+            <a:endParaRPr lang="en-US" smtClean="0"/>
           </a:p>
           <a:p>
             <a:pPr lvl="4"/>
@@ -1020,7 +1033,6 @@
           <a:p>
             <a:fld id="{5BCAD085-E8A6-8845-BD4E-CB4CCA059FC4}" type="datetimeFigureOut">
               <a:rPr lang="en-US" smtClean="0"/>
-              <a:t>1/27/13</a:t>
             </a:fld>
             <a:endParaRPr lang="en-US"/>
           </a:p>
@@ -1062,18 +1074,12 @@
           <a:p>
             <a:fld id="{C1FF6DA9-008F-8B48-92A6-B652298478BF}" type="slidenum">
               <a:rPr lang="en-US" smtClean="0"/>
-              <a:t>‹#›</a:t>
             </a:fld>
             <a:endParaRPr lang="en-US"/>
           </a:p>
         </p:txBody>
       </p:sp>
     </p:spTree>
-    <p:extLst>
-      <p:ext uri="{BB962C8B-B14F-4D97-AF65-F5344CB8AC3E}">
-        <p14:creationId xmlns:p14="http://schemas.microsoft.com/office/powerpoint/2010/main" val="2910927964"/>
-      </p:ext>
-    </p:extLst>
   </p:cSld>
   <p:clrMapOvr>
     <a:masterClrMapping/>
@@ -1151,6 +1157,7 @@
               <a:rPr lang="en-US" smtClean="0"/>
               <a:t>Click to edit Master text styles</a:t>
             </a:r>
+            <a:endParaRPr lang="en-US" smtClean="0"/>
           </a:p>
           <a:p>
             <a:pPr lvl="1"/>
@@ -1158,6 +1165,7 @@
               <a:rPr lang="en-US" smtClean="0"/>
               <a:t>Second level</a:t>
             </a:r>
+            <a:endParaRPr lang="en-US" smtClean="0"/>
           </a:p>
           <a:p>
             <a:pPr lvl="2"/>
@@ -1165,6 +1173,7 @@
               <a:rPr lang="en-US" smtClean="0"/>
               <a:t>Third level</a:t>
             </a:r>
+            <a:endParaRPr lang="en-US" smtClean="0"/>
           </a:p>
           <a:p>
             <a:pPr lvl="3"/>
@@ -1172,6 +1181,7 @@
               <a:rPr lang="en-US" smtClean="0"/>
               <a:t>Fourth level</a:t>
             </a:r>
+            <a:endParaRPr lang="en-US" smtClean="0"/>
           </a:p>
           <a:p>
             <a:pPr lvl="4"/>
@@ -1200,7 +1210,6 @@
           <a:p>
             <a:fld id="{5BCAD085-E8A6-8845-BD4E-CB4CCA059FC4}" type="datetimeFigureOut">
               <a:rPr lang="en-US" smtClean="0"/>
-              <a:t>1/27/13</a:t>
             </a:fld>
             <a:endParaRPr lang="en-US"/>
           </a:p>
@@ -1242,18 +1251,12 @@
           <a:p>
             <a:fld id="{C1FF6DA9-008F-8B48-92A6-B652298478BF}" type="slidenum">
               <a:rPr lang="en-US" smtClean="0"/>
-              <a:t>‹#›</a:t>
             </a:fld>
             <a:endParaRPr lang="en-US"/>
           </a:p>
         </p:txBody>
       </p:sp>
     </p:spTree>
-    <p:extLst>
-      <p:ext uri="{BB962C8B-B14F-4D97-AF65-F5344CB8AC3E}">
-        <p14:creationId xmlns:p14="http://schemas.microsoft.com/office/powerpoint/2010/main" val="3612223792"/>
-      </p:ext>
-    </p:extLst>
   </p:cSld>
   <p:clrMapOvr>
     <a:masterClrMapping/>
@@ -1321,6 +1324,7 @@
               <a:rPr lang="en-US" smtClean="0"/>
               <a:t>Click to edit Master text styles</a:t>
             </a:r>
+            <a:endParaRPr lang="en-US" smtClean="0"/>
           </a:p>
           <a:p>
             <a:pPr lvl="1"/>
@@ -1328,6 +1332,7 @@
               <a:rPr lang="en-US" smtClean="0"/>
               <a:t>Second level</a:t>
             </a:r>
+            <a:endParaRPr lang="en-US" smtClean="0"/>
           </a:p>
           <a:p>
             <a:pPr lvl="2"/>
@@ -1335,6 +1340,7 @@
               <a:rPr lang="en-US" smtClean="0"/>
               <a:t>Third level</a:t>
             </a:r>
+            <a:endParaRPr lang="en-US" smtClean="0"/>
           </a:p>
           <a:p>
             <a:pPr lvl="3"/>
@@ -1342,6 +1348,7 @@
               <a:rPr lang="en-US" smtClean="0"/>
               <a:t>Fourth level</a:t>
             </a:r>
+            <a:endParaRPr lang="en-US" smtClean="0"/>
           </a:p>
           <a:p>
             <a:pPr lvl="4"/>
@@ -1370,7 +1377,6 @@
           <a:p>
             <a:fld id="{5BCAD085-E8A6-8845-BD4E-CB4CCA059FC4}" type="datetimeFigureOut">
               <a:rPr lang="en-US" smtClean="0"/>
-              <a:t>1/27/13</a:t>
             </a:fld>
             <a:endParaRPr lang="en-US"/>
           </a:p>
@@ -1412,18 +1418,12 @@
           <a:p>
             <a:fld id="{C1FF6DA9-008F-8B48-92A6-B652298478BF}" type="slidenum">
               <a:rPr lang="en-US" smtClean="0"/>
-              <a:t>‹#›</a:t>
             </a:fld>
             <a:endParaRPr lang="en-US"/>
           </a:p>
         </p:txBody>
       </p:sp>
     </p:spTree>
-    <p:extLst>
-      <p:ext uri="{BB962C8B-B14F-4D97-AF65-F5344CB8AC3E}">
-        <p14:creationId xmlns:p14="http://schemas.microsoft.com/office/powerpoint/2010/main" val="2614314258"/>
-      </p:ext>
-    </p:extLst>
   </p:cSld>
   <p:clrMapOvr>
     <a:masterClrMapping/>
@@ -1596,6 +1596,7 @@
               <a:rPr lang="en-US" smtClean="0"/>
               <a:t>Click to edit Master text styles</a:t>
             </a:r>
+            <a:endParaRPr lang="en-US" smtClean="0"/>
           </a:p>
         </p:txBody>
       </p:sp>
@@ -1616,7 +1617,6 @@
           <a:p>
             <a:fld id="{5BCAD085-E8A6-8845-BD4E-CB4CCA059FC4}" type="datetimeFigureOut">
               <a:rPr lang="en-US" smtClean="0"/>
-              <a:t>1/27/13</a:t>
             </a:fld>
             <a:endParaRPr lang="en-US"/>
           </a:p>
@@ -1658,18 +1658,12 @@
           <a:p>
             <a:fld id="{C1FF6DA9-008F-8B48-92A6-B652298478BF}" type="slidenum">
               <a:rPr lang="en-US" smtClean="0"/>
-              <a:t>‹#›</a:t>
             </a:fld>
             <a:endParaRPr lang="en-US"/>
           </a:p>
         </p:txBody>
       </p:sp>
     </p:spTree>
-    <p:extLst>
-      <p:ext uri="{BB962C8B-B14F-4D97-AF65-F5344CB8AC3E}">
-        <p14:creationId xmlns:p14="http://schemas.microsoft.com/office/powerpoint/2010/main" val="960648375"/>
-      </p:ext>
-    </p:extLst>
   </p:cSld>
   <p:clrMapOvr>
     <a:masterClrMapping/>
@@ -1770,6 +1764,7 @@
               <a:rPr lang="en-US" smtClean="0"/>
               <a:t>Click to edit Master text styles</a:t>
             </a:r>
+            <a:endParaRPr lang="en-US" smtClean="0"/>
           </a:p>
           <a:p>
             <a:pPr lvl="1"/>
@@ -1777,6 +1772,7 @@
               <a:rPr lang="en-US" smtClean="0"/>
               <a:t>Second level</a:t>
             </a:r>
+            <a:endParaRPr lang="en-US" smtClean="0"/>
           </a:p>
           <a:p>
             <a:pPr lvl="2"/>
@@ -1784,6 +1780,7 @@
               <a:rPr lang="en-US" smtClean="0"/>
               <a:t>Third level</a:t>
             </a:r>
+            <a:endParaRPr lang="en-US" smtClean="0"/>
           </a:p>
           <a:p>
             <a:pPr lvl="3"/>
@@ -1791,6 +1788,7 @@
               <a:rPr lang="en-US" smtClean="0"/>
               <a:t>Fourth level</a:t>
             </a:r>
+            <a:endParaRPr lang="en-US" smtClean="0"/>
           </a:p>
           <a:p>
             <a:pPr lvl="4"/>
@@ -1855,6 +1853,7 @@
               <a:rPr lang="en-US" smtClean="0"/>
               <a:t>Click to edit Master text styles</a:t>
             </a:r>
+            <a:endParaRPr lang="en-US" smtClean="0"/>
           </a:p>
           <a:p>
             <a:pPr lvl="1"/>
@@ -1862,6 +1861,7 @@
               <a:rPr lang="en-US" smtClean="0"/>
               <a:t>Second level</a:t>
             </a:r>
+            <a:endParaRPr lang="en-US" smtClean="0"/>
           </a:p>
           <a:p>
             <a:pPr lvl="2"/>
@@ -1869,6 +1869,7 @@
               <a:rPr lang="en-US" smtClean="0"/>
               <a:t>Third level</a:t>
             </a:r>
+            <a:endParaRPr lang="en-US" smtClean="0"/>
           </a:p>
           <a:p>
             <a:pPr lvl="3"/>
@@ -1876,6 +1877,7 @@
               <a:rPr lang="en-US" smtClean="0"/>
               <a:t>Fourth level</a:t>
             </a:r>
+            <a:endParaRPr lang="en-US" smtClean="0"/>
           </a:p>
           <a:p>
             <a:pPr lvl="4"/>
@@ -1904,7 +1906,6 @@
           <a:p>
             <a:fld id="{5BCAD085-E8A6-8845-BD4E-CB4CCA059FC4}" type="datetimeFigureOut">
               <a:rPr lang="en-US" smtClean="0"/>
-              <a:t>1/27/13</a:t>
             </a:fld>
             <a:endParaRPr lang="en-US"/>
           </a:p>
@@ -1946,18 +1947,12 @@
           <a:p>
             <a:fld id="{C1FF6DA9-008F-8B48-92A6-B652298478BF}" type="slidenum">
               <a:rPr lang="en-US" smtClean="0"/>
-              <a:t>‹#›</a:t>
             </a:fld>
             <a:endParaRPr lang="en-US"/>
           </a:p>
         </p:txBody>
       </p:sp>
     </p:spTree>
-    <p:extLst>
-      <p:ext uri="{BB962C8B-B14F-4D97-AF65-F5344CB8AC3E}">
-        <p14:creationId xmlns:p14="http://schemas.microsoft.com/office/powerpoint/2010/main" val="2782244947"/>
-      </p:ext>
-    </p:extLst>
   </p:cSld>
   <p:clrMapOvr>
     <a:masterClrMapping/>
@@ -2071,6 +2066,7 @@
               <a:rPr lang="en-US" smtClean="0"/>
               <a:t>Click to edit Master text styles</a:t>
             </a:r>
+            <a:endParaRPr lang="en-US" smtClean="0"/>
           </a:p>
         </p:txBody>
       </p:sp>
@@ -2127,6 +2123,7 @@
               <a:rPr lang="en-US" smtClean="0"/>
               <a:t>Click to edit Master text styles</a:t>
             </a:r>
+            <a:endParaRPr lang="en-US" smtClean="0"/>
           </a:p>
           <a:p>
             <a:pPr lvl="1"/>
@@ -2134,6 +2131,7 @@
               <a:rPr lang="en-US" smtClean="0"/>
               <a:t>Second level</a:t>
             </a:r>
+            <a:endParaRPr lang="en-US" smtClean="0"/>
           </a:p>
           <a:p>
             <a:pPr lvl="2"/>
@@ -2141,6 +2139,7 @@
               <a:rPr lang="en-US" smtClean="0"/>
               <a:t>Third level</a:t>
             </a:r>
+            <a:endParaRPr lang="en-US" smtClean="0"/>
           </a:p>
           <a:p>
             <a:pPr lvl="3"/>
@@ -2148,6 +2147,7 @@
               <a:rPr lang="en-US" smtClean="0"/>
               <a:t>Fourth level</a:t>
             </a:r>
+            <a:endParaRPr lang="en-US" smtClean="0"/>
           </a:p>
           <a:p>
             <a:pPr lvl="4"/>
@@ -2221,6 +2221,7 @@
               <a:rPr lang="en-US" smtClean="0"/>
               <a:t>Click to edit Master text styles</a:t>
             </a:r>
+            <a:endParaRPr lang="en-US" smtClean="0"/>
           </a:p>
         </p:txBody>
       </p:sp>
@@ -2277,6 +2278,7 @@
               <a:rPr lang="en-US" smtClean="0"/>
               <a:t>Click to edit Master text styles</a:t>
             </a:r>
+            <a:endParaRPr lang="en-US" smtClean="0"/>
           </a:p>
           <a:p>
             <a:pPr lvl="1"/>
@@ -2284,6 +2286,7 @@
               <a:rPr lang="en-US" smtClean="0"/>
               <a:t>Second level</a:t>
             </a:r>
+            <a:endParaRPr lang="en-US" smtClean="0"/>
           </a:p>
           <a:p>
             <a:pPr lvl="2"/>
@@ -2291,6 +2294,7 @@
               <a:rPr lang="en-US" smtClean="0"/>
               <a:t>Third level</a:t>
             </a:r>
+            <a:endParaRPr lang="en-US" smtClean="0"/>
           </a:p>
           <a:p>
             <a:pPr lvl="3"/>
@@ -2298,6 +2302,7 @@
               <a:rPr lang="en-US" smtClean="0"/>
               <a:t>Fourth level</a:t>
             </a:r>
+            <a:endParaRPr lang="en-US" smtClean="0"/>
           </a:p>
           <a:p>
             <a:pPr lvl="4"/>
@@ -2326,7 +2331,6 @@
           <a:p>
             <a:fld id="{5BCAD085-E8A6-8845-BD4E-CB4CCA059FC4}" type="datetimeFigureOut">
               <a:rPr lang="en-US" smtClean="0"/>
-              <a:t>1/27/13</a:t>
             </a:fld>
             <a:endParaRPr lang="en-US"/>
           </a:p>
@@ -2368,18 +2372,12 @@
           <a:p>
             <a:fld id="{C1FF6DA9-008F-8B48-92A6-B652298478BF}" type="slidenum">
               <a:rPr lang="en-US" smtClean="0"/>
-              <a:t>‹#›</a:t>
             </a:fld>
             <a:endParaRPr lang="en-US"/>
           </a:p>
         </p:txBody>
       </p:sp>
     </p:spTree>
-    <p:extLst>
-      <p:ext uri="{BB962C8B-B14F-4D97-AF65-F5344CB8AC3E}">
-        <p14:creationId xmlns:p14="http://schemas.microsoft.com/office/powerpoint/2010/main" val="990158736"/>
-      </p:ext>
-    </p:extLst>
   </p:cSld>
   <p:clrMapOvr>
     <a:masterClrMapping/>
@@ -2444,7 +2442,6 @@
           <a:p>
             <a:fld id="{5BCAD085-E8A6-8845-BD4E-CB4CCA059FC4}" type="datetimeFigureOut">
               <a:rPr lang="en-US" smtClean="0"/>
-              <a:t>1/27/13</a:t>
             </a:fld>
             <a:endParaRPr lang="en-US"/>
           </a:p>
@@ -2486,18 +2483,12 @@
           <a:p>
             <a:fld id="{C1FF6DA9-008F-8B48-92A6-B652298478BF}" type="slidenum">
               <a:rPr lang="en-US" smtClean="0"/>
-              <a:t>‹#›</a:t>
             </a:fld>
             <a:endParaRPr lang="en-US"/>
           </a:p>
         </p:txBody>
       </p:sp>
     </p:spTree>
-    <p:extLst>
-      <p:ext uri="{BB962C8B-B14F-4D97-AF65-F5344CB8AC3E}">
-        <p14:creationId xmlns:p14="http://schemas.microsoft.com/office/powerpoint/2010/main" val="727027711"/>
-      </p:ext>
-    </p:extLst>
   </p:cSld>
   <p:clrMapOvr>
     <a:masterClrMapping/>
@@ -2539,7 +2530,6 @@
           <a:p>
             <a:fld id="{5BCAD085-E8A6-8845-BD4E-CB4CCA059FC4}" type="datetimeFigureOut">
               <a:rPr lang="en-US" smtClean="0"/>
-              <a:t>1/27/13</a:t>
             </a:fld>
             <a:endParaRPr lang="en-US"/>
           </a:p>
@@ -2581,18 +2571,12 @@
           <a:p>
             <a:fld id="{C1FF6DA9-008F-8B48-92A6-B652298478BF}" type="slidenum">
               <a:rPr lang="en-US" smtClean="0"/>
-              <a:t>‹#›</a:t>
             </a:fld>
             <a:endParaRPr lang="en-US"/>
           </a:p>
         </p:txBody>
       </p:sp>
     </p:spTree>
-    <p:extLst>
-      <p:ext uri="{BB962C8B-B14F-4D97-AF65-F5344CB8AC3E}">
-        <p14:creationId xmlns:p14="http://schemas.microsoft.com/office/powerpoint/2010/main" val="1212999818"/>
-      </p:ext>
-    </p:extLst>
   </p:cSld>
   <p:clrMapOvr>
     <a:masterClrMapping/>
@@ -2702,6 +2686,7 @@
               <a:rPr lang="en-US" smtClean="0"/>
               <a:t>Click to edit Master text styles</a:t>
             </a:r>
+            <a:endParaRPr lang="en-US" smtClean="0"/>
           </a:p>
           <a:p>
             <a:pPr lvl="1"/>
@@ -2709,6 +2694,7 @@
               <a:rPr lang="en-US" smtClean="0"/>
               <a:t>Second level</a:t>
             </a:r>
+            <a:endParaRPr lang="en-US" smtClean="0"/>
           </a:p>
           <a:p>
             <a:pPr lvl="2"/>
@@ -2716,6 +2702,7 @@
               <a:rPr lang="en-US" smtClean="0"/>
               <a:t>Third level</a:t>
             </a:r>
+            <a:endParaRPr lang="en-US" smtClean="0"/>
           </a:p>
           <a:p>
             <a:pPr lvl="3"/>
@@ -2723,6 +2710,7 @@
               <a:rPr lang="en-US" smtClean="0"/>
               <a:t>Fourth level</a:t>
             </a:r>
+            <a:endParaRPr lang="en-US" smtClean="0"/>
           </a:p>
           <a:p>
             <a:pPr lvl="4"/>
@@ -2796,6 +2784,7 @@
               <a:rPr lang="en-US" smtClean="0"/>
               <a:t>Click to edit Master text styles</a:t>
             </a:r>
+            <a:endParaRPr lang="en-US" smtClean="0"/>
           </a:p>
         </p:txBody>
       </p:sp>
@@ -2816,7 +2805,6 @@
           <a:p>
             <a:fld id="{5BCAD085-E8A6-8845-BD4E-CB4CCA059FC4}" type="datetimeFigureOut">
               <a:rPr lang="en-US" smtClean="0"/>
-              <a:t>1/27/13</a:t>
             </a:fld>
             <a:endParaRPr lang="en-US"/>
           </a:p>
@@ -2858,18 +2846,12 @@
           <a:p>
             <a:fld id="{C1FF6DA9-008F-8B48-92A6-B652298478BF}" type="slidenum">
               <a:rPr lang="en-US" smtClean="0"/>
-              <a:t>‹#›</a:t>
             </a:fld>
             <a:endParaRPr lang="en-US"/>
           </a:p>
         </p:txBody>
       </p:sp>
     </p:spTree>
-    <p:extLst>
-      <p:ext uri="{BB962C8B-B14F-4D97-AF65-F5344CB8AC3E}">
-        <p14:creationId xmlns:p14="http://schemas.microsoft.com/office/powerpoint/2010/main" val="1840726560"/>
-      </p:ext>
-    </p:extLst>
   </p:cSld>
   <p:clrMapOvr>
     <a:masterClrMapping/>
@@ -3049,6 +3031,7 @@
               <a:rPr lang="en-US" smtClean="0"/>
               <a:t>Click to edit Master text styles</a:t>
             </a:r>
+            <a:endParaRPr lang="en-US" smtClean="0"/>
           </a:p>
         </p:txBody>
       </p:sp>
@@ -3069,7 +3052,6 @@
           <a:p>
             <a:fld id="{5BCAD085-E8A6-8845-BD4E-CB4CCA059FC4}" type="datetimeFigureOut">
               <a:rPr lang="en-US" smtClean="0"/>
-              <a:t>1/27/13</a:t>
             </a:fld>
             <a:endParaRPr lang="en-US"/>
           </a:p>
@@ -3111,18 +3093,12 @@
           <a:p>
             <a:fld id="{C1FF6DA9-008F-8B48-92A6-B652298478BF}" type="slidenum">
               <a:rPr lang="en-US" smtClean="0"/>
-              <a:t>‹#›</a:t>
             </a:fld>
             <a:endParaRPr lang="en-US"/>
           </a:p>
         </p:txBody>
       </p:sp>
     </p:spTree>
-    <p:extLst>
-      <p:ext uri="{BB962C8B-B14F-4D97-AF65-F5344CB8AC3E}">
-        <p14:creationId xmlns:p14="http://schemas.microsoft.com/office/powerpoint/2010/main" val="3889236939"/>
-      </p:ext>
-    </p:extLst>
   </p:cSld>
   <p:clrMapOvr>
     <a:masterClrMapping/>
@@ -3215,6 +3191,7 @@
               <a:rPr lang="en-US" smtClean="0"/>
               <a:t>Click to edit Master text styles</a:t>
             </a:r>
+            <a:endParaRPr lang="en-US" smtClean="0"/>
           </a:p>
           <a:p>
             <a:pPr lvl="1"/>
@@ -3222,6 +3199,7 @@
               <a:rPr lang="en-US" smtClean="0"/>
               <a:t>Second level</a:t>
             </a:r>
+            <a:endParaRPr lang="en-US" smtClean="0"/>
           </a:p>
           <a:p>
             <a:pPr lvl="2"/>
@@ -3229,6 +3207,7 @@
               <a:rPr lang="en-US" smtClean="0"/>
               <a:t>Third level</a:t>
             </a:r>
+            <a:endParaRPr lang="en-US" smtClean="0"/>
           </a:p>
           <a:p>
             <a:pPr lvl="3"/>
@@ -3236,6 +3215,7 @@
               <a:rPr lang="en-US" smtClean="0"/>
               <a:t>Fourth level</a:t>
             </a:r>
+            <a:endParaRPr lang="en-US" smtClean="0"/>
           </a:p>
           <a:p>
             <a:pPr lvl="4"/>
@@ -3282,7 +3262,6 @@
           <a:p>
             <a:fld id="{5BCAD085-E8A6-8845-BD4E-CB4CCA059FC4}" type="datetimeFigureOut">
               <a:rPr lang="en-US" smtClean="0"/>
-              <a:t>1/27/13</a:t>
             </a:fld>
             <a:endParaRPr lang="en-US"/>
           </a:p>
@@ -3360,18 +3339,12 @@
           <a:p>
             <a:fld id="{C1FF6DA9-008F-8B48-92A6-B652298478BF}" type="slidenum">
               <a:rPr lang="en-US" smtClean="0"/>
-              <a:t>‹#›</a:t>
             </a:fld>
             <a:endParaRPr lang="en-US"/>
           </a:p>
         </p:txBody>
       </p:sp>
     </p:spTree>
-    <p:extLst>
-      <p:ext uri="{BB962C8B-B14F-4D97-AF65-F5344CB8AC3E}">
-        <p14:creationId xmlns:p14="http://schemas.microsoft.com/office/powerpoint/2010/main" val="2209977519"/>
-      </p:ext>
-    </p:extLst>
   </p:cSld>
   <p:clrMap bg1="lt1" tx1="dk1" bg2="lt2" tx2="dk2" accent1="accent1" accent2="accent2" accent3="accent3" accent4="accent4" accent5="accent5" accent6="accent6" hlink="hlink" folHlink="folHlink"/>
   <p:sldLayoutIdLst>
@@ -3409,7 +3382,7 @@
         <a:spcBef>
           <a:spcPct val="20000"/>
         </a:spcBef>
-        <a:buFont typeface="Arial"/>
+        <a:buFont typeface="Arial" panose="020B0604020202020204"/>
         <a:buChar char="•"/>
         <a:defRPr sz="3200" kern="1200">
           <a:solidFill>
@@ -3424,7 +3397,7 @@
         <a:spcBef>
           <a:spcPct val="20000"/>
         </a:spcBef>
-        <a:buFont typeface="Arial"/>
+        <a:buFont typeface="Arial" panose="020B0604020202020204"/>
         <a:buChar char="–"/>
         <a:defRPr sz="2800" kern="1200">
           <a:solidFill>
@@ -3439,7 +3412,7 @@
         <a:spcBef>
           <a:spcPct val="20000"/>
         </a:spcBef>
-        <a:buFont typeface="Arial"/>
+        <a:buFont typeface="Arial" panose="020B0604020202020204"/>
         <a:buChar char="•"/>
         <a:defRPr sz="2400" kern="1200">
           <a:solidFill>
@@ -3454,7 +3427,7 @@
         <a:spcBef>
           <a:spcPct val="20000"/>
         </a:spcBef>
-        <a:buFont typeface="Arial"/>
+        <a:buFont typeface="Arial" panose="020B0604020202020204"/>
         <a:buChar char="–"/>
         <a:defRPr sz="2000" kern="1200">
           <a:solidFill>
@@ -3469,7 +3442,7 @@
         <a:spcBef>
           <a:spcPct val="20000"/>
         </a:spcBef>
-        <a:buFont typeface="Arial"/>
+        <a:buFont typeface="Arial" panose="020B0604020202020204"/>
         <a:buChar char="»"/>
         <a:defRPr sz="2000" kern="1200">
           <a:solidFill>
@@ -3484,7 +3457,7 @@
         <a:spcBef>
           <a:spcPct val="20000"/>
         </a:spcBef>
-        <a:buFont typeface="Arial"/>
+        <a:buFont typeface="Arial" panose="020B0604020202020204"/>
         <a:buChar char="•"/>
         <a:defRPr sz="2000" kern="1200">
           <a:solidFill>
@@ -3499,7 +3472,7 @@
         <a:spcBef>
           <a:spcPct val="20000"/>
         </a:spcBef>
-        <a:buFont typeface="Arial"/>
+        <a:buFont typeface="Arial" panose="020B0604020202020204"/>
         <a:buChar char="•"/>
         <a:defRPr sz="2000" kern="1200">
           <a:solidFill>
@@ -3514,7 +3487,7 @@
         <a:spcBef>
           <a:spcPct val="20000"/>
         </a:spcBef>
-        <a:buFont typeface="Arial"/>
+        <a:buFont typeface="Arial" panose="020B0604020202020204"/>
         <a:buChar char="•"/>
         <a:defRPr sz="2000" kern="1200">
           <a:solidFill>
@@ -3529,7 +3502,7 @@
         <a:spcBef>
           <a:spcPct val="20000"/>
         </a:spcBef>
-        <a:buFont typeface="Arial"/>
+        <a:buFont typeface="Arial" panose="020B0604020202020204"/>
         <a:buChar char="•"/>
         <a:defRPr sz="2000" kern="1200">
           <a:solidFill>
@@ -3641,7 +3614,7 @@
 </file>
 
 <file path=ppt/slides/slide1.xml><?xml version="1.0" encoding="utf-8"?>
-<p:sld xmlns:a="http://schemas.openxmlformats.org/drawingml/2006/main" xmlns:p="http://schemas.openxmlformats.org/presentationml/2006/main" xmlns:r="http://schemas.openxmlformats.org/officeDocument/2006/relationships">
+<p:sld xmlns:a="http://schemas.openxmlformats.org/drawingml/2006/main" xmlns:r="http://schemas.openxmlformats.org/officeDocument/2006/relationships" xmlns:p="http://schemas.openxmlformats.org/presentationml/2006/main">
   <p:cSld>
     <p:spTree>
       <p:nvGrpSpPr>
@@ -3680,6 +3653,11 @@
               </a:rPr>
               <a:t>Can the rail network absorb the America's Cup?</a:t>
             </a:r>
+            <a:endParaRPr sz="2600" b="1">
+              <a:solidFill>
+                <a:srgbClr val="1F395B"/>
+              </a:solidFill>
+            </a:endParaRPr>
           </a:p>
           <a:p>
             <a:r>
@@ -3690,6 +3668,11 @@
               </a:rPr>
               <a:t>Part B — Capacity &amp; Saturation (V/C). Diagnosis only; mitigation = Services-improvement section.</a:t>
             </a:r>
+            <a:endParaRPr sz="1400" i="1">
+              <a:solidFill>
+                <a:srgbClr val="555555"/>
+              </a:solidFill>
+            </a:endParaRPr>
           </a:p>
         </p:txBody>
       </p:sp>
@@ -3728,6 +3711,11 @@
               </a:rPr>
               <a:t>Headline: NOT a capacity problem — a DISTRIBUTION problem.</a:t>
             </a:r>
+            <a:endParaRPr sz="1600" b="1">
+              <a:solidFill>
+                <a:srgbClr val="C0392B"/>
+              </a:solidFill>
+            </a:endParaRPr>
           </a:p>
           <a:p>
             <a:pPr>
@@ -3739,6 +3727,7 @@
               <a:rPr sz="1600" b="0"/>
               <a:t>• Metro Line 1 is the binding constraint: 0.71 → 0.91 at peak (event day), &gt;1.0 at 60% transit share or under corridor concentration (1.20).</a:t>
             </a:r>
+            <a:endParaRPr sz="1600" b="0"/>
           </a:p>
           <a:p>
             <a:pPr>
@@ -3754,6 +3743,11 @@
               </a:rPr>
               <a:t>Demand growth into event zones:</a:t>
             </a:r>
+            <a:endParaRPr sz="1600" b="1">
+              <a:solidFill>
+                <a:srgbClr val="1F395B"/>
+              </a:solidFill>
+            </a:endParaRPr>
           </a:p>
           <a:p>
             <a:pPr>
@@ -3765,6 +3759,7 @@
               <a:rPr sz="1600" b="0"/>
               <a:t>• Region-wide  +9.7%</a:t>
             </a:r>
+            <a:endParaRPr sz="1600" b="0"/>
           </a:p>
           <a:p>
             <a:pPr>
@@ -3776,6 +3771,7 @@
               <a:rPr sz="1600" b="0"/>
               <a:t>• Event-day, 9 event zones  +25%</a:t>
             </a:r>
+            <a:endParaRPr sz="1600" b="0"/>
           </a:p>
           <a:p>
             <a:pPr>
@@ -3791,6 +3787,11 @@
               </a:rPr>
               <a:t>• Steepest: Centro Direzionale +74%, Race Village +45%</a:t>
             </a:r>
+            <a:endParaRPr sz="1600" b="0">
+              <a:solidFill>
+                <a:srgbClr val="C0392B"/>
+              </a:solidFill>
+            </a:endParaRPr>
           </a:p>
           <a:p>
             <a:pPr>
@@ -3802,6 +3803,7 @@
               <a:rPr sz="1600" b="0"/>
               <a:t>• The race venue (Bagnoli) is over-served — 3 lines, V/C only ~0.5–0.7.</a:t>
             </a:r>
+            <a:endParaRPr sz="1600" b="0"/>
           </a:p>
         </p:txBody>
       </p:sp>
@@ -3814,7 +3816,7 @@
           <p:nvPr/>
         </p:nvPicPr>
         <p:blipFill>
-          <a:blip r:embed="rId2"/>
+          <a:blip r:embed="rId1"/>
           <a:stretch>
             <a:fillRect/>
           </a:stretch>
@@ -3838,7 +3840,7 @@
 </file>
 
 <file path=ppt/slides/slide2.xml><?xml version="1.0" encoding="utf-8"?>
-<p:sld xmlns:a="http://schemas.openxmlformats.org/drawingml/2006/main" xmlns:p="http://schemas.openxmlformats.org/presentationml/2006/main" xmlns:r="http://schemas.openxmlformats.org/officeDocument/2006/relationships">
+<p:sld xmlns:a="http://schemas.openxmlformats.org/drawingml/2006/main" xmlns:r="http://schemas.openxmlformats.org/officeDocument/2006/relationships" xmlns:p="http://schemas.openxmlformats.org/presentationml/2006/main">
   <p:cSld>
     <p:spTree>
       <p:nvGrpSpPr>
@@ -3877,6 +3879,11 @@
               </a:rPr>
               <a:t>Saturation concentrates on the central spine — not the venue</a:t>
             </a:r>
+            <a:endParaRPr sz="2600" b="1">
+              <a:solidFill>
+                <a:srgbClr val="1F395B"/>
+              </a:solidFill>
+            </a:endParaRPr>
           </a:p>
         </p:txBody>
       </p:sp>
@@ -3889,7 +3896,7 @@
           <p:nvPr/>
         </p:nvPicPr>
         <p:blipFill>
-          <a:blip r:embed="rId2"/>
+          <a:blip r:embed="rId1"/>
           <a:stretch>
             <a:fillRect/>
           </a:stretch>
@@ -3913,7 +3920,7 @@
           <p:nvPr/>
         </p:nvPicPr>
         <p:blipFill>
-          <a:blip r:embed="rId3"/>
+          <a:blip r:embed="rId2"/>
           <a:stretch>
             <a:fillRect/>
           </a:stretch>
@@ -3963,6 +3970,11 @@
               </a:rPr>
               <a:t>• Choropleth: added demand lands on central Naples / Napoli Centrale; the venue is lighter. Sensitivity: only L1 crosses 1.0 (at 60%).</a:t>
             </a:r>
+            <a:endParaRPr sz="1300" b="0">
+              <a:solidFill>
+                <a:srgbClr val="555555"/>
+              </a:solidFill>
+            </a:endParaRPr>
           </a:p>
         </p:txBody>
       </p:sp>
@@ -3975,7 +3987,7 @@
 </file>
 
 <file path=ppt/slides/slide3.xml><?xml version="1.0" encoding="utf-8"?>
-<p:sld xmlns:a="http://schemas.openxmlformats.org/drawingml/2006/main" xmlns:p="http://schemas.openxmlformats.org/presentationml/2006/main" xmlns:r="http://schemas.openxmlformats.org/officeDocument/2006/relationships">
+<p:sld xmlns:a="http://schemas.openxmlformats.org/drawingml/2006/main" xmlns:r="http://schemas.openxmlformats.org/officeDocument/2006/relationships" xmlns:p="http://schemas.openxmlformats.org/presentationml/2006/main">
   <p:cSld>
     <p:spTree>
       <p:nvGrpSpPr>
@@ -4014,19 +4026,25 @@
               </a:rPr>
               <a:t>Where demand comes from (OSRM) + conclusion</a:t>
             </a:r>
+            <a:endParaRPr sz="2600" b="1">
+              <a:solidFill>
+                <a:srgbClr val="1F395B"/>
+              </a:solidFill>
+            </a:endParaRPr>
           </a:p>
         </p:txBody>
       </p:sp>
       <p:pic>
         <p:nvPicPr>
-          <p:cNvPr id="3" name="Picture 2" descr="B_map_accessibility_shapefile.png"/>
+          <p:cNvPr id="3" name="Picture 2" descr="C:/Users/53592/Desktop/infrastructure PW/5.11 fjy/output_charts/B_map_accessibility_osrm.pngB_map_accessibility_osrm"/>
           <p:cNvPicPr>
             <a:picLocks noChangeAspect="1"/>
           </p:cNvPicPr>
           <p:nvPr/>
         </p:nvPicPr>
         <p:blipFill>
-          <a:blip r:embed="rId2"/>
+          <a:blip r:embed="rId1"/>
+          <a:srcRect l="1599" r="1599"/>
           <a:stretch>
             <a:fillRect/>
           </a:stretch>
@@ -4076,6 +4094,11 @@
               </a:rPr>
               <a:t>Road accessibility (my OSRM 222×222 real-road time matrix):</a:t>
             </a:r>
+            <a:endParaRPr sz="1600" b="1">
+              <a:solidFill>
+                <a:srgbClr val="1F395B"/>
+              </a:solidFill>
+            </a:endParaRPr>
           </a:p>
           <a:p>
             <a:pPr>
@@ -4087,6 +4110,7 @@
               <a:rPr sz="1600" b="0"/>
               <a:t>• 71% of Campania-origin tourist demand is within a 45-min drive (mean 41 min) → Naples-centred → confirms central L1 pressure.</a:t>
             </a:r>
+            <a:endParaRPr sz="1600" b="0"/>
           </a:p>
           <a:p>
             <a:pPr>
@@ -4098,6 +4122,7 @@
               <a:rPr sz="1600" b="0"/>
               <a:t>• ~21% comes from &gt;60 min away (Salerno/Cilento) → relies on road approaches + regional rail.</a:t>
             </a:r>
+            <a:endParaRPr sz="1600" b="0"/>
           </a:p>
         </p:txBody>
       </p:sp>
@@ -4124,31 +4149,39 @@
           <a:lstStyle/>
           <a:p>
             <a:r>
-              <a:rPr b="1" sz="1800">
+              <a:rPr sz="1800" b="1">
                 <a:solidFill>
                   <a:srgbClr val="C0392B"/>
                 </a:solidFill>
               </a:rPr>
               <a:t>Conclusion</a:t>
             </a:r>
+            <a:endParaRPr sz="1800" b="1">
+              <a:solidFill>
+                <a:srgbClr val="C0392B"/>
+              </a:solidFill>
+            </a:endParaRPr>
           </a:p>
           <a:p>
             <a:r>
               <a:rPr sz="1500"/>
               <a:t>• Total capacity is sufficient (~24,000 pax/h/dir) — the issue is its distribution.</a:t>
             </a:r>
+            <a:endParaRPr sz="1500"/>
           </a:p>
           <a:p>
             <a:r>
               <a:rPr sz="1500"/>
               <a:t>• → Target relief on L1 / Napoli Centrale (peak frequency ↑, divert via Line 6).</a:t>
             </a:r>
+            <a:endParaRPr sz="1500"/>
           </a:p>
           <a:p>
             <a:r>
               <a:rPr sz="1500"/>
               <a:t>• Concrete measures (shuttle bus) → Services-improvement section.</a:t>
             </a:r>
+            <a:endParaRPr sz="1500"/>
           </a:p>
         </p:txBody>
       </p:sp>
@@ -4476,7 +4509,11 @@
       </a:style>
     </a:lnDef>
   </a:objectDefaults>
-  <a:extraClrSchemeLst/>
+  <a:extLst>
+    <a:ext uri="{05A4C25C-085E-4340-85A3-A5531E510DB2}">
+      <thm15:themeFamily xmlns:thm15="http://schemas.microsoft.com/office/thememl/2012/main" name="Office Theme" id="{62F939B6-93AF-4DB8-9C6B-D6C7DFDC589F}" vid="{4A3C46E8-61CC-4603-A589-7422A47A8E4A}"/>
+    </a:ext>
+  </a:extLst>
 </a:theme>
 </file>
 
@@ -4796,6 +4833,10 @@
       </a:style>
     </a:lnDef>
   </a:objectDefaults>
-  <a:extraClrSchemeLst/>
+  <a:extLst>
+    <a:ext uri="{05A4C25C-085E-4340-85A3-A5531E510DB2}">
+      <thm15:themeFamily xmlns:thm15="http://schemas.microsoft.com/office/thememl/2012/main" name="Office Theme" id="{62F939B6-93AF-4DB8-9C6B-D6C7DFDC589F}" vid="{4A3C46E8-61CC-4603-A589-7422A47A8E4A}"/>
+    </a:ext>
+  </a:extLst>
 </a:theme>
 </file>